--- a/Dildexplainer.pptx
+++ b/Dildexplainer.pptx
@@ -11,6 +11,7 @@
     <p:sldId id="258" r:id="rId5"/>
     <p:sldId id="261" r:id="rId6"/>
     <p:sldId id="260" r:id="rId7"/>
+    <p:sldId id="262" r:id="rId8"/>
   </p:sldIdLst>
   <p:sldSz cx="12192000" cy="6858000"/>
   <p:notesSz cx="6858000" cy="9144000"/>
@@ -266,7 +267,7 @@
           <a:p>
             <a:fld id="{E62380EB-ABCA-48C2-8C1E-8D7E01BB809D}" type="datetimeFigureOut">
               <a:rPr lang="en-GB" smtClean="0"/>
-              <a:t>11/07/2026</a:t>
+              <a:t>28/07/2026</a:t>
             </a:fld>
             <a:endParaRPr lang="en-GB"/>
           </a:p>
@@ -466,7 +467,7 @@
           <a:p>
             <a:fld id="{E62380EB-ABCA-48C2-8C1E-8D7E01BB809D}" type="datetimeFigureOut">
               <a:rPr lang="en-GB" smtClean="0"/>
-              <a:t>11/07/2026</a:t>
+              <a:t>28/07/2026</a:t>
             </a:fld>
             <a:endParaRPr lang="en-GB"/>
           </a:p>
@@ -676,7 +677,7 @@
           <a:p>
             <a:fld id="{E62380EB-ABCA-48C2-8C1E-8D7E01BB809D}" type="datetimeFigureOut">
               <a:rPr lang="en-GB" smtClean="0"/>
-              <a:t>11/07/2026</a:t>
+              <a:t>28/07/2026</a:t>
             </a:fld>
             <a:endParaRPr lang="en-GB"/>
           </a:p>
@@ -1120,7 +1121,7 @@
           <a:p>
             <a:fld id="{E62380EB-ABCA-48C2-8C1E-8D7E01BB809D}" type="datetimeFigureOut">
               <a:rPr lang="en-GB" smtClean="0"/>
-              <a:t>11/07/2026</a:t>
+              <a:t>28/07/2026</a:t>
             </a:fld>
             <a:endParaRPr lang="en-GB"/>
           </a:p>
@@ -1388,7 +1389,7 @@
           <a:p>
             <a:fld id="{E62380EB-ABCA-48C2-8C1E-8D7E01BB809D}" type="datetimeFigureOut">
               <a:rPr lang="en-GB" smtClean="0"/>
-              <a:t>11/07/2026</a:t>
+              <a:t>28/07/2026</a:t>
             </a:fld>
             <a:endParaRPr lang="en-GB"/>
           </a:p>
@@ -1803,7 +1804,7 @@
           <a:p>
             <a:fld id="{E62380EB-ABCA-48C2-8C1E-8D7E01BB809D}" type="datetimeFigureOut">
               <a:rPr lang="en-GB" smtClean="0"/>
-              <a:t>11/07/2026</a:t>
+              <a:t>28/07/2026</a:t>
             </a:fld>
             <a:endParaRPr lang="en-GB"/>
           </a:p>
@@ -1945,7 +1946,7 @@
           <a:p>
             <a:fld id="{E62380EB-ABCA-48C2-8C1E-8D7E01BB809D}" type="datetimeFigureOut">
               <a:rPr lang="en-GB" smtClean="0"/>
-              <a:t>11/07/2026</a:t>
+              <a:t>28/07/2026</a:t>
             </a:fld>
             <a:endParaRPr lang="en-GB"/>
           </a:p>
@@ -2058,7 +2059,7 @@
           <a:p>
             <a:fld id="{E62380EB-ABCA-48C2-8C1E-8D7E01BB809D}" type="datetimeFigureOut">
               <a:rPr lang="en-GB" smtClean="0"/>
-              <a:t>11/07/2026</a:t>
+              <a:t>28/07/2026</a:t>
             </a:fld>
             <a:endParaRPr lang="en-GB"/>
           </a:p>
@@ -2371,7 +2372,7 @@
           <a:p>
             <a:fld id="{E62380EB-ABCA-48C2-8C1E-8D7E01BB809D}" type="datetimeFigureOut">
               <a:rPr lang="en-GB" smtClean="0"/>
-              <a:t>11/07/2026</a:t>
+              <a:t>28/07/2026</a:t>
             </a:fld>
             <a:endParaRPr lang="en-GB"/>
           </a:p>
@@ -2660,7 +2661,7 @@
           <a:p>
             <a:fld id="{E62380EB-ABCA-48C2-8C1E-8D7E01BB809D}" type="datetimeFigureOut">
               <a:rPr lang="en-GB" smtClean="0"/>
-              <a:t>11/07/2026</a:t>
+              <a:t>28/07/2026</a:t>
             </a:fld>
             <a:endParaRPr lang="en-GB"/>
           </a:p>
@@ -2908,7 +2909,7 @@
           <a:p>
             <a:fld id="{E62380EB-ABCA-48C2-8C1E-8D7E01BB809D}" type="datetimeFigureOut">
               <a:rPr lang="en-GB" smtClean="0"/>
-              <a:t>11/07/2026</a:t>
+              <a:t>28/07/2026</a:t>
             </a:fld>
             <a:endParaRPr lang="en-GB"/>
           </a:p>
@@ -4398,11 +4399,13 @@
         <p:spPr>
           <a:xfrm>
             <a:off x="838199" y="1133856"/>
-            <a:ext cx="5049485" cy="5043107"/>
+            <a:ext cx="4401313" cy="5724144"/>
           </a:xfrm>
         </p:spPr>
         <p:txBody>
-          <a:bodyPr/>
+          <a:bodyPr>
+            <a:normAutofit fontScale="85000" lnSpcReduction="20000"/>
+          </a:bodyPr>
           <a:lstStyle/>
           <a:p>
             <a:r>
@@ -4413,6 +4416,19 @@
           <a:p>
             <a:r>
               <a:rPr lang="en-GB" dirty="0"/>
+              <a:t>The % column is the percentile value of the Dildex for that horse’s ante-post price</a:t>
+            </a:r>
+          </a:p>
+          <a:p>
+            <a:pPr lvl="1"/>
+            <a:r>
+              <a:rPr lang="en-GB" dirty="0"/>
+              <a:t>Higher values = rare high values for that horse’s ante-post price</a:t>
+            </a:r>
+          </a:p>
+          <a:p>
+            <a:r>
+              <a:rPr lang="en-GB" dirty="0"/>
               <a:t>Will also add to this with some more subjective standard detail</a:t>
             </a:r>
           </a:p>
@@ -4435,16 +4451,122 @@
             </a:r>
           </a:p>
           <a:p>
+            <a:endParaRPr lang="en-GB" dirty="0"/>
+          </a:p>
+        </p:txBody>
+      </p:sp>
+      <p:sp>
+        <p:nvSpPr>
+          <p:cNvPr id="6" name="TextBox 5">
+            <a:extLst>
+              <a:ext uri="{FF2B5EF4-FFF2-40B4-BE49-F238E27FC236}">
+                <a16:creationId xmlns:a16="http://schemas.microsoft.com/office/drawing/2014/main" id="{BDF1CF6B-9720-D2FE-D825-A5597C8973DF}"/>
+              </a:ext>
+            </a:extLst>
+          </p:cNvPr>
+          <p:cNvSpPr txBox="1"/>
+          <p:nvPr/>
+        </p:nvSpPr>
+        <p:spPr>
+          <a:xfrm>
+            <a:off x="5305968" y="4688356"/>
+            <a:ext cx="6514671" cy="1477328"/>
+          </a:xfrm>
+          <a:prstGeom prst="rect">
+            <a:avLst/>
+          </a:prstGeom>
+          <a:noFill/>
+        </p:spPr>
+        <p:txBody>
+          <a:bodyPr wrap="square" rtlCol="0">
+            <a:spAutoFit/>
+          </a:bodyPr>
+          <a:lstStyle/>
+          <a:p>
+            <a:pPr marL="285750" indent="-285750">
+              <a:buFont typeface="Arial" panose="020B0604020202020204" pitchFamily="34" charset="0"/>
+              <a:buChar char="•"/>
+            </a:pPr>
+            <a:r>
+              <a:rPr lang="en-GB" b="1" dirty="0"/>
+              <a:t>PC </a:t>
+            </a:r>
             <a:r>
               <a:rPr lang="en-GB" dirty="0"/>
-              <a:t>Etc.</a:t>
-            </a:r>
-          </a:p>
-          <a:p>
-            <a:endParaRPr lang="en-GB" dirty="0"/>
-          </a:p>
-          <a:p>
-            <a:endParaRPr lang="en-GB" dirty="0"/>
+              <a:t>– place chance (Places/Runners) </a:t>
+            </a:r>
+          </a:p>
+          <a:p>
+            <a:pPr marL="285750" indent="-285750">
+              <a:buFont typeface="Arial" panose="020B0604020202020204" pitchFamily="34" charset="0"/>
+              <a:buChar char="•"/>
+            </a:pPr>
+            <a:r>
+              <a:rPr lang="en-GB" b="1" dirty="0"/>
+              <a:t>#</a:t>
+            </a:r>
+            <a:r>
+              <a:rPr lang="en-GB" dirty="0"/>
+              <a:t> - race count, </a:t>
+            </a:r>
+          </a:p>
+          <a:p>
+            <a:pPr marL="285750" indent="-285750">
+              <a:buFont typeface="Arial" panose="020B0604020202020204" pitchFamily="34" charset="0"/>
+              <a:buChar char="•"/>
+            </a:pPr>
+            <a:r>
+              <a:rPr lang="en-GB" b="1" dirty="0"/>
+              <a:t>C</a:t>
+            </a:r>
+            <a:r>
+              <a:rPr lang="en-GB" dirty="0"/>
+              <a:t> = Course Win, </a:t>
+            </a:r>
+            <a:r>
+              <a:rPr lang="en-GB" b="1" dirty="0"/>
+              <a:t>D</a:t>
+            </a:r>
+            <a:r>
+              <a:rPr lang="en-GB" dirty="0"/>
+              <a:t>=</a:t>
+            </a:r>
+            <a:r>
+              <a:rPr lang="en-GB" dirty="0" err="1"/>
+              <a:t>Dist</a:t>
+            </a:r>
+            <a:r>
+              <a:rPr lang="en-GB" dirty="0"/>
+              <a:t> win, </a:t>
+            </a:r>
+          </a:p>
+          <a:p>
+            <a:pPr marL="285750" indent="-285750">
+              <a:buFont typeface="Arial" panose="020B0604020202020204" pitchFamily="34" charset="0"/>
+              <a:buChar char="•"/>
+            </a:pPr>
+            <a:r>
+              <a:rPr lang="en-GB" b="1" dirty="0"/>
+              <a:t>%</a:t>
+            </a:r>
+            <a:r>
+              <a:rPr lang="en-GB" dirty="0"/>
+              <a:t> = Dildex percentile for price, </a:t>
+            </a:r>
+          </a:p>
+          <a:p>
+            <a:pPr marL="285750" indent="-285750">
+              <a:buFont typeface="Arial" panose="020B0604020202020204" pitchFamily="34" charset="0"/>
+              <a:buChar char="•"/>
+            </a:pPr>
+            <a:r>
+              <a:rPr lang="en-GB" b="1" dirty="0"/>
+              <a:t>DR</a:t>
+            </a:r>
+            <a:r>
+              <a:rPr lang="en-GB" dirty="0"/>
+              <a:t> = Dildex Rank</a:t>
+            </a:r>
           </a:p>
         </p:txBody>
       </p:sp>
@@ -4453,7 +4575,7 @@
           <p:cNvPr id="5" name="Picture 4">
             <a:extLst>
               <a:ext uri="{FF2B5EF4-FFF2-40B4-BE49-F238E27FC236}">
-                <a16:creationId xmlns:a16="http://schemas.microsoft.com/office/drawing/2014/main" id="{4C913DD6-023D-15D8-2EC6-326569E0CCE8}"/>
+                <a16:creationId xmlns:a16="http://schemas.microsoft.com/office/drawing/2014/main" id="{A8E74620-22E8-473B-5AD7-79C31F4D6410}"/>
               </a:ext>
             </a:extLst>
           </p:cNvPr>
@@ -4470,20 +4592,170 @@
         </p:blipFill>
         <p:spPr>
           <a:xfrm>
-            <a:off x="5887684" y="1747398"/>
-            <a:ext cx="5853268" cy="3363204"/>
+            <a:off x="5385406" y="1214628"/>
+            <a:ext cx="6355794" cy="3197884"/>
           </a:xfrm>
           <a:prstGeom prst="rect">
             <a:avLst/>
           </a:prstGeom>
         </p:spPr>
       </p:pic>
+    </p:spTree>
+    <p:extLst>
+      <p:ext uri="{BB962C8B-B14F-4D97-AF65-F5344CB8AC3E}">
+        <p14:creationId xmlns:p14="http://schemas.microsoft.com/office/powerpoint/2010/main" val="606475165"/>
+      </p:ext>
+    </p:extLst>
+  </p:cSld>
+  <p:clrMapOvr>
+    <a:masterClrMapping/>
+  </p:clrMapOvr>
+</p:sld>
+</file>
+
+<file path=ppt/slides/slide7.xml><?xml version="1.0" encoding="utf-8"?>
+<p:sld xmlns:a="http://schemas.openxmlformats.org/drawingml/2006/main" xmlns:r="http://schemas.openxmlformats.org/officeDocument/2006/relationships" xmlns:p="http://schemas.openxmlformats.org/presentationml/2006/main">
+  <p:cSld>
+    <p:spTree>
+      <p:nvGrpSpPr>
+        <p:cNvPr id="1" name="">
+          <a:extLst>
+            <a:ext uri="{FF2B5EF4-FFF2-40B4-BE49-F238E27FC236}">
+              <a16:creationId xmlns:a16="http://schemas.microsoft.com/office/drawing/2014/main" id="{4A479B03-34C6-40F9-204E-1A167C704D79}"/>
+            </a:ext>
+          </a:extLst>
+        </p:cNvPr>
+        <p:cNvGrpSpPr/>
+        <p:nvPr/>
+      </p:nvGrpSpPr>
+      <p:grpSpPr>
+        <a:xfrm>
+          <a:off x="0" y="0"/>
+          <a:ext cx="0" cy="0"/>
+          <a:chOff x="0" y="0"/>
+          <a:chExt cx="0" cy="0"/>
+        </a:xfrm>
+      </p:grpSpPr>
+      <p:sp>
+        <p:nvSpPr>
+          <p:cNvPr id="2" name="Title 1">
+            <a:extLst>
+              <a:ext uri="{FF2B5EF4-FFF2-40B4-BE49-F238E27FC236}">
+                <a16:creationId xmlns:a16="http://schemas.microsoft.com/office/drawing/2014/main" id="{0FF6996E-AF25-73CE-A010-BBF2BD4632CC}"/>
+              </a:ext>
+            </a:extLst>
+          </p:cNvPr>
+          <p:cNvSpPr>
+            <a:spLocks noGrp="1"/>
+          </p:cNvSpPr>
+          <p:nvPr>
+            <p:ph type="title"/>
+          </p:nvPr>
+        </p:nvSpPr>
+        <p:spPr/>
+        <p:txBody>
+          <a:bodyPr/>
+          <a:lstStyle/>
+          <a:p>
+            <a:r>
+              <a:rPr lang="en-GB" dirty="0"/>
+              <a:t>Dildex Racecard: </a:t>
+            </a:r>
+            <a:r>
+              <a:rPr lang="en-GB" sz="2000" dirty="0">
+                <a:hlinkClick r:id="rId2"/>
+              </a:rPr>
+              <a:t>https://richsdixon.github.io/horses/dildex.html#card</a:t>
+            </a:r>
+            <a:r>
+              <a:rPr lang="en-GB" sz="2000" dirty="0"/>
+              <a:t> </a:t>
+            </a:r>
+            <a:endParaRPr lang="en-GB" sz="1800" dirty="0"/>
+          </a:p>
+        </p:txBody>
+      </p:sp>
+      <p:sp>
+        <p:nvSpPr>
+          <p:cNvPr id="3" name="Content Placeholder 2">
+            <a:extLst>
+              <a:ext uri="{FF2B5EF4-FFF2-40B4-BE49-F238E27FC236}">
+                <a16:creationId xmlns:a16="http://schemas.microsoft.com/office/drawing/2014/main" id="{B2F9DE35-F3A9-9B05-D0E2-B7F07DDCAFE4}"/>
+              </a:ext>
+            </a:extLst>
+          </p:cNvPr>
+          <p:cNvSpPr>
+            <a:spLocks noGrp="1"/>
+          </p:cNvSpPr>
+          <p:nvPr>
+            <p:ph idx="1"/>
+          </p:nvPr>
+        </p:nvSpPr>
+        <p:spPr>
+          <a:xfrm>
+            <a:off x="838199" y="1133856"/>
+            <a:ext cx="4251037" cy="5043107"/>
+          </a:xfrm>
+        </p:spPr>
+        <p:txBody>
+          <a:bodyPr>
+            <a:normAutofit fontScale="92500" lnSpcReduction="10000"/>
+          </a:bodyPr>
+          <a:lstStyle/>
+          <a:p>
+            <a:r>
+              <a:rPr lang="en-GB" dirty="0">
+                <a:solidFill>
+                  <a:srgbClr val="FF0000"/>
+                </a:solidFill>
+              </a:rPr>
+              <a:t>These data </a:t>
+            </a:r>
+            <a:r>
+              <a:rPr lang="en-GB" dirty="0"/>
+              <a:t>are using the average PRB and count of races to predict the chance of a place using</a:t>
+            </a:r>
+          </a:p>
+          <a:p>
+            <a:pPr lvl="1"/>
+            <a:r>
+              <a:rPr lang="en-GB" dirty="0"/>
+              <a:t>The horse</a:t>
+            </a:r>
+          </a:p>
+          <a:p>
+            <a:pPr lvl="1"/>
+            <a:r>
+              <a:rPr lang="en-GB" dirty="0"/>
+              <a:t>The jockey/trainer combo</a:t>
+            </a:r>
+          </a:p>
+          <a:p>
+            <a:r>
+              <a:rPr lang="en-GB" dirty="0"/>
+              <a:t>Just another additional data point to sit alongside the Dildex</a:t>
+            </a:r>
+          </a:p>
+          <a:p>
+            <a:r>
+              <a:rPr lang="en-GB" dirty="0"/>
+              <a:t>Needs a lot of work though </a:t>
+            </a:r>
+          </a:p>
+          <a:p>
+            <a:endParaRPr lang="en-GB" dirty="0"/>
+          </a:p>
+          <a:p>
+            <a:endParaRPr lang="en-GB" dirty="0"/>
+          </a:p>
+        </p:txBody>
+      </p:sp>
       <p:sp>
         <p:nvSpPr>
           <p:cNvPr id="6" name="TextBox 5">
             <a:extLst>
               <a:ext uri="{FF2B5EF4-FFF2-40B4-BE49-F238E27FC236}">
-                <a16:creationId xmlns:a16="http://schemas.microsoft.com/office/drawing/2014/main" id="{BDF1CF6B-9720-D2FE-D825-A5597C8973DF}"/>
+                <a16:creationId xmlns:a16="http://schemas.microsoft.com/office/drawing/2014/main" id="{EB46119F-D44E-F517-A318-521360A1A8FD}"/>
               </a:ext>
             </a:extLst>
           </p:cNvPr>
@@ -4492,8 +4764,8 @@
         </p:nvSpPr>
         <p:spPr>
           <a:xfrm>
-            <a:off x="5385407" y="5319051"/>
-            <a:ext cx="6514671" cy="1200329"/>
+            <a:off x="5226529" y="4699635"/>
+            <a:ext cx="6514671" cy="1477328"/>
           </a:xfrm>
           <a:prstGeom prst="rect">
             <a:avLst/>
@@ -4516,6 +4788,16 @@
             </a:r>
           </a:p>
           <a:p>
+            <a:pPr marL="742950" lvl="1" indent="-285750">
+              <a:buFont typeface="Arial" panose="020B0604020202020204" pitchFamily="34" charset="0"/>
+              <a:buChar char="•"/>
+            </a:pPr>
+            <a:r>
+              <a:rPr lang="en-GB" dirty="0"/>
+              <a:t>Can also filter on “Place Chance”</a:t>
+            </a:r>
+          </a:p>
+          <a:p>
             <a:pPr marL="285750" indent="-285750">
               <a:buFont typeface="Arial" panose="020B0604020202020204" pitchFamily="34" charset="0"/>
               <a:buChar char="•"/>
@@ -4527,10 +4809,200 @@
           </a:p>
         </p:txBody>
       </p:sp>
+      <p:pic>
+        <p:nvPicPr>
+          <p:cNvPr id="8" name="Picture 7">
+            <a:extLst>
+              <a:ext uri="{FF2B5EF4-FFF2-40B4-BE49-F238E27FC236}">
+                <a16:creationId xmlns:a16="http://schemas.microsoft.com/office/drawing/2014/main" id="{E77ACCEA-4453-D75D-E918-95F67192EF4B}"/>
+              </a:ext>
+            </a:extLst>
+          </p:cNvPr>
+          <p:cNvPicPr>
+            <a:picLocks noChangeAspect="1"/>
+          </p:cNvPicPr>
+          <p:nvPr/>
+        </p:nvPicPr>
+        <p:blipFill>
+          <a:blip r:embed="rId3"/>
+          <a:stretch>
+            <a:fillRect/>
+          </a:stretch>
+        </p:blipFill>
+        <p:spPr>
+          <a:xfrm>
+            <a:off x="5385406" y="1189331"/>
+            <a:ext cx="6355794" cy="3197884"/>
+          </a:xfrm>
+          <a:prstGeom prst="rect">
+            <a:avLst/>
+          </a:prstGeom>
+        </p:spPr>
+      </p:pic>
+      <p:sp>
+        <p:nvSpPr>
+          <p:cNvPr id="4" name="Rectangle 3">
+            <a:extLst>
+              <a:ext uri="{FF2B5EF4-FFF2-40B4-BE49-F238E27FC236}">
+                <a16:creationId xmlns:a16="http://schemas.microsoft.com/office/drawing/2014/main" id="{F17632A9-E428-7409-A2CF-3FE72599B1FF}"/>
+              </a:ext>
+            </a:extLst>
+          </p:cNvPr>
+          <p:cNvSpPr/>
+          <p:nvPr/>
+        </p:nvSpPr>
+        <p:spPr>
+          <a:xfrm>
+            <a:off x="10735055" y="3063850"/>
+            <a:ext cx="1006145" cy="1323365"/>
+          </a:xfrm>
+          <a:prstGeom prst="rect">
+            <a:avLst/>
+          </a:prstGeom>
+          <a:noFill/>
+          <a:ln w="57150">
+            <a:solidFill>
+              <a:srgbClr val="FF0000"/>
+            </a:solidFill>
+          </a:ln>
+        </p:spPr>
+        <p:style>
+          <a:lnRef idx="2">
+            <a:schemeClr val="accent1">
+              <a:shade val="15000"/>
+            </a:schemeClr>
+          </a:lnRef>
+          <a:fillRef idx="1">
+            <a:schemeClr val="accent1"/>
+          </a:fillRef>
+          <a:effectRef idx="0">
+            <a:schemeClr val="accent1"/>
+          </a:effectRef>
+          <a:fontRef idx="minor">
+            <a:schemeClr val="lt1"/>
+          </a:fontRef>
+        </p:style>
+        <p:txBody>
+          <a:bodyPr rtlCol="0" anchor="ctr"/>
+          <a:lstStyle/>
+          <a:p>
+            <a:pPr algn="ctr"/>
+            <a:endParaRPr lang="en-GB"/>
+          </a:p>
+        </p:txBody>
+      </p:sp>
+      <p:sp>
+        <p:nvSpPr>
+          <p:cNvPr id="9" name="Freeform: Shape 8">
+            <a:extLst>
+              <a:ext uri="{FF2B5EF4-FFF2-40B4-BE49-F238E27FC236}">
+                <a16:creationId xmlns:a16="http://schemas.microsoft.com/office/drawing/2014/main" id="{8078DAE8-2A96-18AC-DA20-F7B7EA00D9B7}"/>
+              </a:ext>
+            </a:extLst>
+          </p:cNvPr>
+          <p:cNvSpPr/>
+          <p:nvPr/>
+        </p:nvSpPr>
+        <p:spPr>
+          <a:xfrm>
+            <a:off x="5249325" y="2983345"/>
+            <a:ext cx="447387" cy="2164727"/>
+          </a:xfrm>
+          <a:custGeom>
+            <a:avLst/>
+            <a:gdLst>
+              <a:gd name="csX0" fmla="*/ 447387 w 447387"/>
+              <a:gd name="csY0" fmla="*/ 1911941 h 1911941"/>
+              <a:gd name="csX1" fmla="*/ 127347 w 447387"/>
+              <a:gd name="csY1" fmla="*/ 1573613 h 1911941"/>
+              <a:gd name="csX2" fmla="*/ 8475 w 447387"/>
+              <a:gd name="csY2" fmla="*/ 741509 h 1911941"/>
+              <a:gd name="csX3" fmla="*/ 26763 w 447387"/>
+              <a:gd name="csY3" fmla="*/ 92285 h 1911941"/>
+              <a:gd name="csX4" fmla="*/ 163923 w 447387"/>
+              <a:gd name="csY4" fmla="*/ 19133 h 1911941"/>
+            </a:gdLst>
+            <a:ahLst/>
+            <a:cxnLst>
+              <a:cxn ang="0">
+                <a:pos x="csX0" y="csY0"/>
+              </a:cxn>
+              <a:cxn ang="0">
+                <a:pos x="csX1" y="csY1"/>
+              </a:cxn>
+              <a:cxn ang="0">
+                <a:pos x="csX2" y="csY2"/>
+              </a:cxn>
+              <a:cxn ang="0">
+                <a:pos x="csX3" y="csY3"/>
+              </a:cxn>
+              <a:cxn ang="0">
+                <a:pos x="csX4" y="csY4"/>
+              </a:cxn>
+            </a:cxnLst>
+            <a:rect l="l" t="t" r="r" b="b"/>
+            <a:pathLst>
+              <a:path w="447387" h="1911941">
+                <a:moveTo>
+                  <a:pt x="447387" y="1911941"/>
+                </a:moveTo>
+                <a:cubicBezTo>
+                  <a:pt x="323943" y="1840313"/>
+                  <a:pt x="200499" y="1768685"/>
+                  <a:pt x="127347" y="1573613"/>
+                </a:cubicBezTo>
+                <a:cubicBezTo>
+                  <a:pt x="54195" y="1378541"/>
+                  <a:pt x="25239" y="988397"/>
+                  <a:pt x="8475" y="741509"/>
+                </a:cubicBezTo>
+                <a:cubicBezTo>
+                  <a:pt x="-8289" y="494621"/>
+                  <a:pt x="855" y="212681"/>
+                  <a:pt x="26763" y="92285"/>
+                </a:cubicBezTo>
+                <a:cubicBezTo>
+                  <a:pt x="52671" y="-28111"/>
+                  <a:pt x="108297" y="-4489"/>
+                  <a:pt x="163923" y="19133"/>
+                </a:cubicBezTo>
+              </a:path>
+            </a:pathLst>
+          </a:custGeom>
+          <a:noFill/>
+          <a:ln>
+            <a:tailEnd type="triangle" w="lg" len="lg"/>
+          </a:ln>
+        </p:spPr>
+        <p:style>
+          <a:lnRef idx="2">
+            <a:schemeClr val="accent1">
+              <a:shade val="15000"/>
+            </a:schemeClr>
+          </a:lnRef>
+          <a:fillRef idx="1">
+            <a:schemeClr val="accent1"/>
+          </a:fillRef>
+          <a:effectRef idx="0">
+            <a:schemeClr val="accent1"/>
+          </a:effectRef>
+          <a:fontRef idx="minor">
+            <a:schemeClr val="lt1"/>
+          </a:fontRef>
+        </p:style>
+        <p:txBody>
+          <a:bodyPr rtlCol="0" anchor="ctr"/>
+          <a:lstStyle/>
+          <a:p>
+            <a:pPr algn="ctr"/>
+            <a:endParaRPr lang="en-GB"/>
+          </a:p>
+        </p:txBody>
+      </p:sp>
     </p:spTree>
     <p:extLst>
       <p:ext uri="{BB962C8B-B14F-4D97-AF65-F5344CB8AC3E}">
-        <p14:creationId xmlns:p14="http://schemas.microsoft.com/office/powerpoint/2010/main" val="606475165"/>
+        <p14:creationId xmlns:p14="http://schemas.microsoft.com/office/powerpoint/2010/main" val="294834577"/>
       </p:ext>
     </p:extLst>
   </p:cSld>
